--- a/classes/parte-7-red-team-y-operaciones-ofensivas/173-bloodhound-y-analisis-de-rutas-de-ataque/clase-173-presentacion.pptx
+++ b/classes/parte-7-red-team-y-operaciones-ofensivas/173-bloodhound-y-analisis-de-rutas-de-ataque/clase-173-presentacion.pptx
@@ -17,6 +17,9 @@
     <p:sldId id="265" r:id="rId16"/>
     <p:sldId id="266" r:id="rId17"/>
     <p:sldId id="267" r:id="rId18"/>
+    <p:sldId id="268" r:id="rId19"/>
+    <p:sldId id="269" r:id="rId20"/>
+    <p:sldId id="270" r:id="rId21"/>
   </p:sldIdLst>
   <p:sldSz cx="9144000" cy="6858000" type="screen4x3"/>
   <p:notesSz cx="6858000" cy="9144000"/>
@@ -3198,7 +3201,7 @@
                   <a:srgbClr val="0B3D2E"/>
                 </a:solidFill>
               </a:rPr>
-              <a:t>⚠️ Errores comunes</a:t>
+              <a:t>✍️ Ejercicios</a:t>
             </a:r>
           </a:p>
         </p:txBody>
@@ -3236,67 +3239,82 @@
                   <a:srgbClr val="22282E"/>
                 </a:solidFill>
               </a:rPr>
-              <a:t>•  No hay caminos a DA — Datos incompletos; recolecta con -c All y marca "Owned"</a:t>
-            </a:r>
-          </a:p>
-          <a:p>
-            <a:pPr>
-              <a:spcAft>
-                <a:spcPts val="600"/>
-              </a:spcAft>
-            </a:pPr>
-            <a:r>
-              <a:rPr sz="1500">
-                <a:solidFill>
-                  <a:srgbClr val="22282E"/>
-                </a:solidFill>
-              </a:rPr>
-              <a:t>•  Importación falla — Versión de collector incompatible con BloodHound CE; usa versiones emparejadas</a:t>
-            </a:r>
-          </a:p>
-          <a:p>
-            <a:pPr>
-              <a:spcAft>
-                <a:spcPts val="600"/>
-              </a:spcAft>
-            </a:pPr>
-            <a:r>
-              <a:rPr sz="1500">
-                <a:solidFill>
-                  <a:srgbClr val="22282E"/>
-                </a:solidFill>
-              </a:rPr>
-              <a:t>•  Grafo vacío — Neo4j no conectado o import erróneo; revisa credenciales de Neo4j</a:t>
-            </a:r>
-          </a:p>
-          <a:p>
-            <a:pPr>
-              <a:spcAft>
-                <a:spcPts val="600"/>
-              </a:spcAft>
-            </a:pPr>
-            <a:r>
-              <a:rPr sz="1500">
-                <a:solidFill>
-                  <a:srgbClr val="22282E"/>
-                </a:solidFill>
-              </a:rPr>
-              <a:t>•  SharpHound detectado — Recolección ruidosa; usa métodos más selectivos y espaciados</a:t>
-            </a:r>
-          </a:p>
-          <a:p>
-            <a:pPr>
-              <a:spcAft>
-                <a:spcPts val="600"/>
-              </a:spcAft>
-            </a:pPr>
-            <a:r>
-              <a:rPr sz="1500">
-                <a:solidFill>
-                  <a:srgbClr val="22282E"/>
-                </a:solidFill>
-              </a:rPr>
-              <a:t>•  Aristas sin sentido — Datos viejos; vuelve a recolectar tras cambios en el lab</a:t>
+              <a:t>•  Recolecta el lab con dos collectors distintos y compara los resultados.</a:t>
+            </a:r>
+          </a:p>
+          <a:p>
+            <a:pPr>
+              <a:spcAft>
+                <a:spcPts val="600"/>
+              </a:spcAft>
+            </a:pPr>
+            <a:r>
+              <a:rPr sz="1500">
+                <a:solidFill>
+                  <a:srgbClr val="22282E"/>
+                </a:solidFill>
+              </a:rPr>
+              <a:t>•  Encuentra el camino más corto de tu usuario a Domain Admins.</a:t>
+            </a:r>
+          </a:p>
+          <a:p>
+            <a:pPr>
+              <a:spcAft>
+                <a:spcPts val="600"/>
+              </a:spcAft>
+            </a:pPr>
+            <a:r>
+              <a:rPr sz="1500">
+                <a:solidFill>
+                  <a:srgbClr val="22282E"/>
+                </a:solidFill>
+              </a:rPr>
+              <a:t>•  Explica cómo se abusa de WriteDACL sobre un grupo.</a:t>
+            </a:r>
+          </a:p>
+          <a:p>
+            <a:pPr>
+              <a:spcAft>
+                <a:spcPts val="600"/>
+              </a:spcAft>
+            </a:pPr>
+            <a:r>
+              <a:rPr sz="1500">
+                <a:solidFill>
+                  <a:srgbClr val="22282E"/>
+                </a:solidFill>
+              </a:rPr>
+              <a:t>•  Escribe una consulta Cypher que liste equipos con Unconstrained Delegation.</a:t>
+            </a:r>
+          </a:p>
+          <a:p>
+            <a:pPr>
+              <a:spcAft>
+                <a:spcPts val="600"/>
+              </a:spcAft>
+            </a:pPr>
+            <a:r>
+              <a:rPr sz="1500">
+                <a:solidFill>
+                  <a:srgbClr val="22282E"/>
+                </a:solidFill>
+              </a:rPr>
+              <a:t>•  Prioriza dos rutas por sigilo y justifica tu elección.</a:t>
+            </a:r>
+          </a:p>
+          <a:p>
+            <a:pPr>
+              <a:spcAft>
+                <a:spcPts val="600"/>
+              </a:spcAft>
+            </a:pPr>
+            <a:r>
+              <a:rPr sz="1500">
+                <a:solidFill>
+                  <a:srgbClr val="22282E"/>
+                </a:solidFill>
+              </a:rPr>
+              <a:t>•  Usa BloodHound de forma defensiva: identifica una relación peligrosa que recomendarías eliminar.</a:t>
             </a:r>
           </a:p>
         </p:txBody>
@@ -3347,7 +3365,7 @@
                   <a:srgbClr val="0B3D2E"/>
                 </a:solidFill>
               </a:rPr>
-              <a:t>❓ Preguntas frecuentes</a:t>
+              <a:t>📝 Reto verificable</a:t>
             </a:r>
           </a:p>
         </p:txBody>
@@ -3385,82 +3403,22 @@
                   <a:srgbClr val="22282E"/>
                 </a:solidFill>
               </a:rPr>
-              <a:t>•  ❓ ¿BloodHound explota por mí?</a:t>
-            </a:r>
-          </a:p>
-          <a:p>
-            <a:pPr>
-              <a:spcAft>
-                <a:spcPts val="600"/>
-              </a:spcAft>
-            </a:pPr>
-            <a:r>
-              <a:rPr sz="1500">
-                <a:solidFill>
-                  <a:srgbClr val="22282E"/>
-                </a:solidFill>
-              </a:rPr>
-              <a:t>•  No; identifica las rutas y explica cómo abusarlas, pero la explotación la ejecutas tú con otras herramientas (PowerView, Impacket, Rubeus).</a:t>
-            </a:r>
-          </a:p>
-          <a:p>
-            <a:pPr>
-              <a:spcAft>
-                <a:spcPts val="600"/>
-              </a:spcAft>
-            </a:pPr>
-            <a:r>
-              <a:rPr sz="1500">
-                <a:solidFill>
-                  <a:srgbClr val="22282E"/>
-                </a:solidFill>
-              </a:rPr>
-              <a:t>•  ❓ ¿CE o legacy?</a:t>
-            </a:r>
-          </a:p>
-          <a:p>
-            <a:pPr>
-              <a:spcAft>
-                <a:spcPts val="600"/>
-              </a:spcAft>
-            </a:pPr>
-            <a:r>
-              <a:rPr sz="1500">
-                <a:solidFill>
-                  <a:srgbClr val="22282E"/>
-                </a:solidFill>
-              </a:rPr>
-              <a:t>•  BloodHound CE es la versión actual y recomendada. La legacy sigue documentada, pero CE trae mejor rendimiento y despliegue con Docker.</a:t>
-            </a:r>
-          </a:p>
-          <a:p>
-            <a:pPr>
-              <a:spcAft>
-                <a:spcPts val="600"/>
-              </a:spcAft>
-            </a:pPr>
-            <a:r>
-              <a:rPr sz="1500">
-                <a:solidFill>
-                  <a:srgbClr val="22282E"/>
-                </a:solidFill>
-              </a:rPr>
-              <a:t>•  ❓ ¿También sirve para defender?</a:t>
-            </a:r>
-          </a:p>
-          <a:p>
-            <a:pPr>
-              <a:spcAft>
-                <a:spcPts val="600"/>
-              </a:spcAft>
-            </a:pPr>
-            <a:r>
-              <a:rPr sz="1500">
-                <a:solidFill>
-                  <a:srgbClr val="22282E"/>
-                </a:solidFill>
-              </a:rPr>
-              <a:t>•  Sí. Los defensores lo usan para encontrar y cortar rutas peligrosas (relaciones ACL excesivas) antes de que un atacante las explote.</a:t>
+              <a:t>•  Con BloodHound, identifica y documenta una ruta completa desde un usuario de bajo privilegio hasta Domain Admins en tu AD lab, explicando cómo se abusa de cada arista del camino.</a:t>
+            </a:r>
+          </a:p>
+          <a:p>
+            <a:pPr>
+              <a:spcAft>
+                <a:spcPts val="600"/>
+              </a:spcAft>
+            </a:pPr>
+            <a:r>
+              <a:rPr sz="1500">
+                <a:solidFill>
+                  <a:srgbClr val="22282E"/>
+                </a:solidFill>
+              </a:rPr>
+              <a:t>•  Criterio de aceptación: presentas el grafo con la ruta resaltada, listas cada arista en orden con la técnica concreta de abuso, y señalas cuál es el "salto" más ruidoso de la cadena.</a:t>
             </a:r>
           </a:p>
         </p:txBody>
@@ -3511,7 +3469,7 @@
                   <a:srgbClr val="0B3D2E"/>
                 </a:solidFill>
               </a:rPr>
-              <a:t>🔗 Referencias</a:t>
+              <a:t>⚠️ Errores comunes</a:t>
             </a:r>
           </a:p>
         </p:txBody>
@@ -3549,56 +3507,474 @@
                   <a:srgbClr val="22282E"/>
                 </a:solidFill>
               </a:rPr>
-              <a:t>•  SpecterOps — BloodHound CE. &lt;https://bloodhound.specterops.io/&gt; · &lt;https://github.com/SpecterOps/BloodHound&gt;</a:t>
-            </a:r>
-          </a:p>
-          <a:p>
-            <a:pPr>
-              <a:spcAft>
-                <a:spcPts val="600"/>
-              </a:spcAft>
-            </a:pPr>
-            <a:r>
-              <a:rPr sz="1500">
-                <a:solidFill>
-                  <a:srgbClr val="22282E"/>
-                </a:solidFill>
-              </a:rPr>
-              <a:t>•  bloodhound-python. &lt;https://github.com/dirkjanm/BloodHound.py&gt;</a:t>
-            </a:r>
-          </a:p>
-          <a:p>
-            <a:pPr>
-              <a:spcAft>
-                <a:spcPts val="600"/>
-              </a:spcAft>
-            </a:pPr>
-            <a:r>
-              <a:rPr sz="1500">
-                <a:solidFill>
-                  <a:srgbClr val="22282E"/>
-                </a:solidFill>
-              </a:rPr>
-              <a:t>•  The Hacker Recipes — DACL abuse. &lt;https://www.thehacker.recipes/ad/movement/dacl/&gt;</a:t>
-            </a:r>
-          </a:p>
-          <a:p>
-            <a:pPr>
-              <a:spcAft>
-                <a:spcPts val="600"/>
-              </a:spcAft>
-            </a:pPr>
-            <a:r>
-              <a:rPr sz="1500">
-                <a:solidFill>
-                  <a:srgbClr val="22282E"/>
-                </a:solidFill>
-              </a:rPr>
-              <a:t>•  SpecterOps — blog sobre attack paths.</a:t>
-            </a:r>
-          </a:p>
-        </p:txBody>
-      </p:sp>
+              <a:t>•  No hay caminos a DA — Datos incompletos; recolecta con -c All y marca "Owned"</a:t>
+            </a:r>
+          </a:p>
+          <a:p>
+            <a:pPr>
+              <a:spcAft>
+                <a:spcPts val="600"/>
+              </a:spcAft>
+            </a:pPr>
+            <a:r>
+              <a:rPr sz="1500">
+                <a:solidFill>
+                  <a:srgbClr val="22282E"/>
+                </a:solidFill>
+              </a:rPr>
+              <a:t>•  Importación falla — Versión de collector incompatible con BloodHound CE; usa versiones emparejadas</a:t>
+            </a:r>
+          </a:p>
+          <a:p>
+            <a:pPr>
+              <a:spcAft>
+                <a:spcPts val="600"/>
+              </a:spcAft>
+            </a:pPr>
+            <a:r>
+              <a:rPr sz="1500">
+                <a:solidFill>
+                  <a:srgbClr val="22282E"/>
+                </a:solidFill>
+              </a:rPr>
+              <a:t>•  Grafo vacío — Neo4j no conectado o import erróneo; revisa credenciales de Neo4j</a:t>
+            </a:r>
+          </a:p>
+          <a:p>
+            <a:pPr>
+              <a:spcAft>
+                <a:spcPts val="600"/>
+              </a:spcAft>
+            </a:pPr>
+            <a:r>
+              <a:rPr sz="1500">
+                <a:solidFill>
+                  <a:srgbClr val="22282E"/>
+                </a:solidFill>
+              </a:rPr>
+              <a:t>•  SharpHound detectado — Recolección ruidosa; usa métodos más selectivos y espaciados</a:t>
+            </a:r>
+          </a:p>
+          <a:p>
+            <a:pPr>
+              <a:spcAft>
+                <a:spcPts val="600"/>
+              </a:spcAft>
+            </a:pPr>
+            <a:r>
+              <a:rPr sz="1500">
+                <a:solidFill>
+                  <a:srgbClr val="22282E"/>
+                </a:solidFill>
+              </a:rPr>
+              <a:t>•  Aristas sin sentido — Datos viejos; vuelve a recolectar tras cambios en el lab</a:t>
+            </a:r>
+          </a:p>
+        </p:txBody>
+      </p:sp>
+    </p:spTree>
+  </p:cSld>
+  <p:clrMapOvr>
+    <a:masterClrMapping/>
+  </p:clrMapOvr>
+</p:sld>
+</file>
+
+<file path=ppt/slides/slide13.xml><?xml version="1.0" encoding="utf-8"?>
+<p:sld xmlns:a="http://schemas.openxmlformats.org/drawingml/2006/main" xmlns:p="http://schemas.openxmlformats.org/presentationml/2006/main" xmlns:r="http://schemas.openxmlformats.org/officeDocument/2006/relationships">
+  <p:cSld>
+    <p:spTree>
+      <p:nvGrpSpPr>
+        <p:cNvPr id="1" name=""/>
+        <p:cNvGrpSpPr/>
+        <p:nvPr/>
+      </p:nvGrpSpPr>
+      <p:grpSpPr/>
+      <p:sp>
+        <p:nvSpPr>
+          <p:cNvPr id="2" name="TextBox 1"/>
+          <p:cNvSpPr txBox="1"/>
+          <p:nvPr/>
+        </p:nvSpPr>
+        <p:spPr>
+          <a:xfrm>
+            <a:off x="457200" y="320040"/>
+            <a:ext cx="8229600" cy="822960"/>
+          </a:xfrm>
+          <a:prstGeom prst="rect">
+            <a:avLst/>
+          </a:prstGeom>
+          <a:noFill/>
+        </p:spPr>
+        <p:txBody>
+          <a:bodyPr wrap="square">
+            <a:spAutoFit/>
+          </a:bodyPr>
+          <a:lstStyle/>
+          <a:p>
+            <a:r>
+              <a:rPr sz="2600" b="1">
+                <a:solidFill>
+                  <a:srgbClr val="0B3D2E"/>
+                </a:solidFill>
+              </a:rPr>
+              <a:t>❓ Preguntas frecuentes</a:t>
+            </a:r>
+          </a:p>
+        </p:txBody>
+      </p:sp>
+      <p:sp>
+        <p:nvSpPr>
+          <p:cNvPr id="3" name="TextBox 2"/>
+          <p:cNvSpPr txBox="1"/>
+          <p:nvPr/>
+        </p:nvSpPr>
+        <p:spPr>
+          <a:xfrm>
+            <a:off x="457200" y="1280160"/>
+            <a:ext cx="8229600" cy="4937760"/>
+          </a:xfrm>
+          <a:prstGeom prst="rect">
+            <a:avLst/>
+          </a:prstGeom>
+          <a:noFill/>
+        </p:spPr>
+        <p:txBody>
+          <a:bodyPr wrap="square">
+            <a:spAutoFit/>
+          </a:bodyPr>
+          <a:lstStyle/>
+          <a:p>
+            <a:pPr>
+              <a:spcAft>
+                <a:spcPts val="600"/>
+              </a:spcAft>
+            </a:pPr>
+            <a:r>
+              <a:rPr sz="1500">
+                <a:solidFill>
+                  <a:srgbClr val="22282E"/>
+                </a:solidFill>
+              </a:rPr>
+              <a:t>•  ❓ ¿BloodHound explota por mí?</a:t>
+            </a:r>
+          </a:p>
+          <a:p>
+            <a:pPr>
+              <a:spcAft>
+                <a:spcPts val="600"/>
+              </a:spcAft>
+            </a:pPr>
+            <a:r>
+              <a:rPr sz="1500">
+                <a:solidFill>
+                  <a:srgbClr val="22282E"/>
+                </a:solidFill>
+              </a:rPr>
+              <a:t>•  No; identifica las rutas y explica cómo abusarlas, pero la explotación la ejecutas tú con otras herramientas (PowerView, Impacket, Rubeus).</a:t>
+            </a:r>
+          </a:p>
+          <a:p>
+            <a:pPr>
+              <a:spcAft>
+                <a:spcPts val="600"/>
+              </a:spcAft>
+            </a:pPr>
+            <a:r>
+              <a:rPr sz="1500">
+                <a:solidFill>
+                  <a:srgbClr val="22282E"/>
+                </a:solidFill>
+              </a:rPr>
+              <a:t>•  ❓ ¿CE o legacy?</a:t>
+            </a:r>
+          </a:p>
+          <a:p>
+            <a:pPr>
+              <a:spcAft>
+                <a:spcPts val="600"/>
+              </a:spcAft>
+            </a:pPr>
+            <a:r>
+              <a:rPr sz="1500">
+                <a:solidFill>
+                  <a:srgbClr val="22282E"/>
+                </a:solidFill>
+              </a:rPr>
+              <a:t>•  BloodHound CE es la versión actual y recomendada. La legacy sigue documentada, pero CE trae mejor rendimiento y despliegue con Docker.</a:t>
+            </a:r>
+          </a:p>
+          <a:p>
+            <a:pPr>
+              <a:spcAft>
+                <a:spcPts val="600"/>
+              </a:spcAft>
+            </a:pPr>
+            <a:r>
+              <a:rPr sz="1500">
+                <a:solidFill>
+                  <a:srgbClr val="22282E"/>
+                </a:solidFill>
+              </a:rPr>
+              <a:t>•  ❓ ¿También sirve para defender?</a:t>
+            </a:r>
+          </a:p>
+          <a:p>
+            <a:pPr>
+              <a:spcAft>
+                <a:spcPts val="600"/>
+              </a:spcAft>
+            </a:pPr>
+            <a:r>
+              <a:rPr sz="1500">
+                <a:solidFill>
+                  <a:srgbClr val="22282E"/>
+                </a:solidFill>
+              </a:rPr>
+              <a:t>•  Sí. Los defensores lo usan para encontrar y cortar rutas peligrosas (relaciones ACL excesivas) antes de que un atacante las explote.</a:t>
+            </a:r>
+          </a:p>
+        </p:txBody>
+      </p:sp>
+    </p:spTree>
+  </p:cSld>
+  <p:clrMapOvr>
+    <a:masterClrMapping/>
+  </p:clrMapOvr>
+</p:sld>
+</file>
+
+<file path=ppt/slides/slide14.xml><?xml version="1.0" encoding="utf-8"?>
+<p:sld xmlns:a="http://schemas.openxmlformats.org/drawingml/2006/main" xmlns:p="http://schemas.openxmlformats.org/presentationml/2006/main" xmlns:r="http://schemas.openxmlformats.org/officeDocument/2006/relationships">
+  <p:cSld>
+    <p:spTree>
+      <p:nvGrpSpPr>
+        <p:cNvPr id="1" name=""/>
+        <p:cNvGrpSpPr/>
+        <p:nvPr/>
+      </p:nvGrpSpPr>
+      <p:grpSpPr/>
+      <p:sp>
+        <p:nvSpPr>
+          <p:cNvPr id="2" name="TextBox 1"/>
+          <p:cNvSpPr txBox="1"/>
+          <p:nvPr/>
+        </p:nvSpPr>
+        <p:spPr>
+          <a:xfrm>
+            <a:off x="457200" y="320040"/>
+            <a:ext cx="8229600" cy="822960"/>
+          </a:xfrm>
+          <a:prstGeom prst="rect">
+            <a:avLst/>
+          </a:prstGeom>
+          <a:noFill/>
+        </p:spPr>
+        <p:txBody>
+          <a:bodyPr wrap="square">
+            <a:spAutoFit/>
+          </a:bodyPr>
+          <a:lstStyle/>
+          <a:p>
+            <a:r>
+              <a:rPr sz="2600" b="1">
+                <a:solidFill>
+                  <a:srgbClr val="0B3D2E"/>
+                </a:solidFill>
+              </a:rPr>
+              <a:t>🔗 Referencias</a:t>
+            </a:r>
+          </a:p>
+        </p:txBody>
+      </p:sp>
+      <p:sp>
+        <p:nvSpPr>
+          <p:cNvPr id="3" name="TextBox 2"/>
+          <p:cNvSpPr txBox="1"/>
+          <p:nvPr/>
+        </p:nvSpPr>
+        <p:spPr>
+          <a:xfrm>
+            <a:off x="457200" y="1280160"/>
+            <a:ext cx="8229600" cy="4937760"/>
+          </a:xfrm>
+          <a:prstGeom prst="rect">
+            <a:avLst/>
+          </a:prstGeom>
+          <a:noFill/>
+        </p:spPr>
+        <p:txBody>
+          <a:bodyPr wrap="square">
+            <a:spAutoFit/>
+          </a:bodyPr>
+          <a:lstStyle/>
+          <a:p>
+            <a:pPr>
+              <a:spcAft>
+                <a:spcPts val="600"/>
+              </a:spcAft>
+            </a:pPr>
+            <a:r>
+              <a:rPr sz="1500">
+                <a:solidFill>
+                  <a:srgbClr val="22282E"/>
+                </a:solidFill>
+              </a:rPr>
+              <a:t>•  SpecterOps — BloodHound: Attack Paths. &lt;https://bloodhound.specterops.io/analyze-data/findings/attack-paths&gt; — fuente principal para nodos iniciales, objetivos, rutas y remediación.</a:t>
+            </a:r>
+          </a:p>
+          <a:p>
+            <a:pPr>
+              <a:spcAft>
+                <a:spcPts val="600"/>
+              </a:spcAft>
+            </a:pPr>
+            <a:r>
+              <a:rPr sz="1500">
+                <a:solidFill>
+                  <a:srgbClr val="22282E"/>
+                </a:solidFill>
+              </a:rPr>
+              <a:t>•  SpecterOps — BloodHound CE documentation. &lt;https://bloodhound.specterops.io/&gt; — referencia oficial para recolección, importación y semántica del modelo.</a:t>
+            </a:r>
+          </a:p>
+          <a:p>
+            <a:pPr>
+              <a:spcAft>
+                <a:spcPts val="600"/>
+              </a:spcAft>
+            </a:pPr>
+            <a:r>
+              <a:rPr sz="1500">
+                <a:solidFill>
+                  <a:srgbClr val="22282E"/>
+                </a:solidFill>
+              </a:rPr>
+              <a:t>•  SpecterOps — repositorio oficial de BloodHound. &lt;https://github.com/SpecterOps/BloodHound&gt; — fuente usada para fijar la versión del software desplegado en el laboratorio.</a:t>
+            </a:r>
+          </a:p>
+          <a:p>
+            <a:pPr>
+              <a:spcAft>
+                <a:spcPts val="600"/>
+              </a:spcAft>
+            </a:pPr>
+            <a:r>
+              <a:rPr sz="1500">
+                <a:solidFill>
+                  <a:srgbClr val="22282E"/>
+                </a:solidFill>
+              </a:rPr>
+              <a:t>•  Microsoft — Best Practices for Securing Active Directory. &lt;https://learn.microsoft.com/en-us/windows-server/identity/ad-ds/plan/security-best-practices/best-practices-for-securing-active-directory&gt; —…</a:t>
+            </a:r>
+          </a:p>
+          <a:p>
+            <a:pPr>
+              <a:spcAft>
+                <a:spcPts val="600"/>
+              </a:spcAft>
+            </a:pPr>
+            <a:r>
+              <a:rPr sz="1500">
+                <a:solidFill>
+                  <a:srgbClr val="22282E"/>
+                </a:solidFill>
+              </a:rPr>
+              <a:t>•  bloodhound-python. &lt;https://github.com/dirkjanm/BloodHound.py&gt; — documentación del recolector alternativo utilizado en el laboratorio.</a:t>
+            </a:r>
+          </a:p>
+          <a:p>
+            <a:pPr>
+              <a:spcAft>
+                <a:spcPts val="600"/>
+              </a:spcAft>
+            </a:pPr>
+            <a:r>
+              <a:rPr sz="1500">
+                <a:solidFill>
+                  <a:srgbClr val="22282E"/>
+                </a:solidFill>
+              </a:rPr>
+              <a:t>•  The Hacker Recipes — DACL abuse. &lt;https://www.thehacker.recipes/ad/movement/dacl/&gt; — apoyo práctico; cada conclusión se valida contra la semántica oficial de la arista.</a:t>
+            </a:r>
+          </a:p>
+        </p:txBody>
+      </p:sp>
+    </p:spTree>
+  </p:cSld>
+  <p:clrMapOvr>
+    <a:masterClrMapping/>
+  </p:clrMapOvr>
+</p:sld>
+</file>
+
+<file path=ppt/slides/slide15.xml><?xml version="1.0" encoding="utf-8"?>
+<p:sld xmlns:a="http://schemas.openxmlformats.org/drawingml/2006/main" xmlns:p="http://schemas.openxmlformats.org/presentationml/2006/main" xmlns:r="http://schemas.openxmlformats.org/officeDocument/2006/relationships">
+  <p:cSld>
+    <p:spTree>
+      <p:nvGrpSpPr>
+        <p:cNvPr id="1" name=""/>
+        <p:cNvGrpSpPr/>
+        <p:nvPr/>
+      </p:nvGrpSpPr>
+      <p:grpSpPr/>
+      <p:sp>
+        <p:nvSpPr>
+          <p:cNvPr id="2" name="TextBox 1"/>
+          <p:cNvSpPr txBox="1"/>
+          <p:nvPr/>
+        </p:nvSpPr>
+        <p:spPr>
+          <a:xfrm>
+            <a:off x="457200" y="274320"/>
+            <a:ext cx="8229600" cy="640080"/>
+          </a:xfrm>
+          <a:prstGeom prst="rect">
+            <a:avLst/>
+          </a:prstGeom>
+          <a:noFill/>
+        </p:spPr>
+        <p:txBody>
+          <a:bodyPr wrap="square">
+            <a:spAutoFit/>
+          </a:bodyPr>
+          <a:lstStyle/>
+          <a:p>
+            <a:r>
+              <a:rPr sz="2200" b="1">
+                <a:solidFill>
+                  <a:srgbClr val="0B3D2E"/>
+                </a:solidFill>
+              </a:rPr>
+              <a:t>Diagrama de la clase</a:t>
+            </a:r>
+          </a:p>
+        </p:txBody>
+      </p:sp>
+      <p:pic>
+        <p:nvPicPr>
+          <p:cNvPr id="3" name="Picture 2" descr="480fe6787b83f6b5.png"/>
+          <p:cNvPicPr>
+            <a:picLocks noChangeAspect="1"/>
+          </p:cNvPicPr>
+          <p:nvPr/>
+        </p:nvPicPr>
+        <p:blipFill>
+          <a:blip r:embed="rId2"/>
+          <a:stretch>
+            <a:fillRect/>
+          </a:stretch>
+        </p:blipFill>
+        <p:spPr>
+          <a:xfrm>
+            <a:off x="457200" y="3008376"/>
+            <a:ext cx="8229600" cy="1481328"/>
+          </a:xfrm>
+          <a:prstGeom prst="rect">
+            <a:avLst/>
+          </a:prstGeom>
+        </p:spPr>
+      </p:pic>
     </p:spTree>
   </p:cSld>
   <p:clrMapOvr>
@@ -3683,7 +4059,7 @@
                   <a:srgbClr val="22282E"/>
                 </a:solidFill>
               </a:rPr>
-              <a:t>•  Usar BloodHound para modelar Active Directory como un grafo y descubrir rutas de ataque hacia el compromiso de dominio que serían invisibles a simple vista. El alumno recolectará datos con SharpHound/bloodhound-python, importará el grafo y usará las consultas para encontrar el camino más corto de un usuario de bajo privilegio a Domain Admin.</a:t>
+              <a:t>•  Usar BloodHound para modelar Active Directory como un grafo y descubrir rutas de ataque hacia el compromiso de dominio que serían invisibles a simple vista. El alumno recolectará datos con…</a:t>
             </a:r>
           </a:p>
         </p:txBody>
@@ -4077,7 +4453,7 @@
                   <a:srgbClr val="0B3D2E"/>
                 </a:solidFill>
               </a:rPr>
-              <a:t>📖 Definiciones y características</a:t>
+              <a:t>🧠 Explicación en profundidad</a:t>
             </a:r>
           </a:p>
         </p:txBody>
@@ -4115,82 +4491,97 @@
                   <a:srgbClr val="22282E"/>
                 </a:solidFill>
               </a:rPr>
-              <a:t>•  BloodHound: herramienta que modela AD como grafo para hallar rutas de ataque. Característica: convierte relaciones complejas en caminos visibles.</a:t>
-            </a:r>
-          </a:p>
-          <a:p>
-            <a:pPr>
-              <a:spcAft>
-                <a:spcPts val="600"/>
-              </a:spcAft>
-            </a:pPr>
-            <a:r>
-              <a:rPr sz="1500">
-                <a:solidFill>
-                  <a:srgbClr val="22282E"/>
-                </a:solidFill>
-              </a:rPr>
-              <a:t>•  SharpHound: collector que extrae objetos y relaciones del dominio. Característica: genera JSON/zip para importar.</a:t>
-            </a:r>
-          </a:p>
-          <a:p>
-            <a:pPr>
-              <a:spcAft>
-                <a:spcPts val="600"/>
-              </a:spcAft>
-            </a:pPr>
-            <a:r>
-              <a:rPr sz="1500">
-                <a:solidFill>
-                  <a:srgbClr val="22282E"/>
-                </a:solidFill>
-              </a:rPr>
-              <a:t>•  Arista abusable: relación de permiso explotable (ej. GenericAll). Característica: define un "salto" en la ruta.</a:t>
-            </a:r>
-          </a:p>
-          <a:p>
-            <a:pPr>
-              <a:spcAft>
-                <a:spcPts val="600"/>
-              </a:spcAft>
-            </a:pPr>
-            <a:r>
-              <a:rPr sz="1500">
-                <a:solidFill>
-                  <a:srgbClr val="22282E"/>
-                </a:solidFill>
-              </a:rPr>
-              <a:t>•  GenericAll / WriteDACL: control total o sobre la ACL de un objeto. Característica: permiten tomar control de cuentas/grupos.</a:t>
-            </a:r>
-          </a:p>
-          <a:p>
-            <a:pPr>
-              <a:spcAft>
-                <a:spcPts val="600"/>
-              </a:spcAft>
-            </a:pPr>
-            <a:r>
-              <a:rPr sz="1500">
-                <a:solidFill>
-                  <a:srgbClr val="22282E"/>
-                </a:solidFill>
-              </a:rPr>
-              <a:t>•  Cypher: lenguaje de consulta de grafos (Neo4j). Característica: permite preguntas personalizadas.</a:t>
-            </a:r>
-          </a:p>
-          <a:p>
-            <a:pPr>
-              <a:spcAft>
-                <a:spcPts val="600"/>
-              </a:spcAft>
-            </a:pPr>
-            <a:r>
-              <a:rPr sz="1500">
-                <a:solidFill>
-                  <a:srgbClr val="22282E"/>
-                </a:solidFill>
-              </a:rPr>
-              <a:t>•  Attack path: secuencia de aristas de un nodo controlado a uno objetivo. Característica: el "mapa" del ataque.</a:t>
+              <a:t>•  Una auditoría puede listar miembros de grupos privilegiados y no detectar que una cuenta ordinaria controla indirectamente a uno de ellos. BloodHound modela identidades, equipos, grupos, sesiones y…</a:t>
+            </a:r>
+          </a:p>
+          <a:p>
+            <a:pPr>
+              <a:spcAft>
+                <a:spcPts val="600"/>
+              </a:spcAft>
+            </a:pPr>
+            <a:r>
+              <a:rPr sz="1500">
+                <a:solidFill>
+                  <a:srgbClr val="22282E"/>
+                </a:solidFill>
+              </a:rPr>
+              <a:t>•  Un nodo representa una entidad; una arista expresa una relación con dirección y semántica. MemberOf no significa lo mismo que GenericAll, y HasSession describe estado observado, no un permiso…</a:t>
+            </a:r>
+          </a:p>
+          <a:p>
+            <a:pPr>
+              <a:spcAft>
+                <a:spcPts val="600"/>
+              </a:spcAft>
+            </a:pPr>
+            <a:r>
+              <a:rPr sz="1500">
+                <a:solidFill>
+                  <a:srgbClr val="22282E"/>
+                </a:solidFill>
+              </a:rPr>
+              <a:t>•  El camino es una hipótesis: hay que confirmar que los datos siguen vigentes, que la ACE no está condicionada por herencia, que el servidor es alcanzable y que la sesión continúa existiendo.…</a:t>
+            </a:r>
+          </a:p>
+          <a:p>
+            <a:pPr>
+              <a:spcAft>
+                <a:spcPts val="600"/>
+              </a:spcAft>
+            </a:pPr>
+            <a:r>
+              <a:rPr sz="1500">
+                <a:solidFill>
+                  <a:srgbClr val="22282E"/>
+                </a:solidFill>
+              </a:rPr>
+              <a:t>•  La recolección combina objetos relativamente estables —grupos o ACL— con estados volátiles —sesiones—. Cada conjunto necesita marca de tiempo, identidad recolectora, métodos habilitados y cobertura.…</a:t>
+            </a:r>
+          </a:p>
+          <a:p>
+            <a:pPr>
+              <a:spcAft>
+                <a:spcPts val="600"/>
+              </a:spcAft>
+            </a:pPr>
+            <a:r>
+              <a:rPr sz="1500">
+                <a:solidFill>
+                  <a:srgbClr val="22282E"/>
+                </a:solidFill>
+              </a:rPr>
+              <a:t>•  La cuenta colectora también condiciona visibilidad. Que no aparezca una relación puede significar que no existe, que no fue consultada o que la identidad no pudo verla. Ausencia en el grafo no…</a:t>
+            </a:r>
+          </a:p>
+          <a:p>
+            <a:pPr>
+              <a:spcAft>
+                <a:spcPts val="600"/>
+              </a:spcAft>
+            </a:pPr>
+            <a:r>
+              <a:rPr sz="1500">
+                <a:solidFill>
+                  <a:srgbClr val="22282E"/>
+                </a:solidFill>
+              </a:rPr>
+              <a:t>•  El camino con menos aristas ayuda a explorar, pero el control defensivo se elige por alcance y efecto. Quitar una ACE heredada mal concedida puede cortar cientos de rutas; cerrar una sesión corta una…</a:t>
+            </a:r>
+          </a:p>
+          <a:p>
+            <a:pPr>
+              <a:spcAft>
+                <a:spcPts val="600"/>
+              </a:spcAft>
+            </a:pPr>
+            <a:r>
+              <a:rPr sz="1500">
+                <a:solidFill>
+                  <a:srgbClr val="22282E"/>
+                </a:solidFill>
+              </a:rPr>
+              <a:t>•  Conviene etiquetar activos de alto valor y puntos de entrada realistas, y comparar rutas antes y después de un cambio. Así BloodHound valida delegaciones de helpdesk, separación de niveles, cuentas…</a:t>
             </a:r>
           </a:p>
         </p:txBody>
@@ -4241,7 +4632,7 @@
                   <a:srgbClr val="0B3D2E"/>
                 </a:solidFill>
               </a:rPr>
-              <a:t>🧰 Herramientas y preparación</a:t>
+              <a:t>📖 Definiciones y características</a:t>
             </a:r>
           </a:p>
         </p:txBody>
@@ -4279,52 +4670,82 @@
                   <a:srgbClr val="22282E"/>
                 </a:solidFill>
               </a:rPr>
-              <a:t>•  BloodHound CE (Docker) o BloodHound legacy + Neo4j.</a:t>
-            </a:r>
-          </a:p>
-          <a:p>
-            <a:pPr>
-              <a:spcAft>
-                <a:spcPts val="600"/>
-              </a:spcAft>
-            </a:pPr>
-            <a:r>
-              <a:rPr sz="1500">
-                <a:solidFill>
-                  <a:srgbClr val="22282E"/>
-                </a:solidFill>
-              </a:rPr>
-              <a:t>•  SharpHound (Windows) o bloodhound-python desde Linux.</a:t>
-            </a:r>
-          </a:p>
-          <a:p>
-            <a:pPr>
-              <a:spcAft>
-                <a:spcPts val="600"/>
-              </a:spcAft>
-            </a:pPr>
-            <a:r>
-              <a:rPr sz="1500">
-                <a:solidFill>
-                  <a:srgbClr val="22282E"/>
-                </a:solidFill>
-              </a:rPr>
-              <a:t>•  El AD lab / GOAD con datos de las clases anteriores (recolección de la Clase 170).</a:t>
-            </a:r>
-          </a:p>
-          <a:p>
-            <a:pPr>
-              <a:spcAft>
-                <a:spcPts val="600"/>
-              </a:spcAft>
-            </a:pPr>
-            <a:r>
-              <a:rPr sz="1500">
-                <a:solidFill>
-                  <a:srgbClr val="22282E"/>
-                </a:solidFill>
-              </a:rPr>
-              <a:t>•  Credenciales de bajo privilegio como punto de partida del análisis.</a:t>
+              <a:t>•  BloodHound: herramienta que modela AD como grafo para hallar rutas de ataque. Característica: convierte relaciones complejas en caminos visibles.</a:t>
+            </a:r>
+          </a:p>
+          <a:p>
+            <a:pPr>
+              <a:spcAft>
+                <a:spcPts val="600"/>
+              </a:spcAft>
+            </a:pPr>
+            <a:r>
+              <a:rPr sz="1500">
+                <a:solidFill>
+                  <a:srgbClr val="22282E"/>
+                </a:solidFill>
+              </a:rPr>
+              <a:t>•  SharpHound: collector que extrae objetos y relaciones del dominio. Característica: genera JSON/zip para importar.</a:t>
+            </a:r>
+          </a:p>
+          <a:p>
+            <a:pPr>
+              <a:spcAft>
+                <a:spcPts val="600"/>
+              </a:spcAft>
+            </a:pPr>
+            <a:r>
+              <a:rPr sz="1500">
+                <a:solidFill>
+                  <a:srgbClr val="22282E"/>
+                </a:solidFill>
+              </a:rPr>
+              <a:t>•  Arista abusable: relación de permiso explotable (ej. GenericAll). Característica: define un "salto" en la ruta.</a:t>
+            </a:r>
+          </a:p>
+          <a:p>
+            <a:pPr>
+              <a:spcAft>
+                <a:spcPts val="600"/>
+              </a:spcAft>
+            </a:pPr>
+            <a:r>
+              <a:rPr sz="1500">
+                <a:solidFill>
+                  <a:srgbClr val="22282E"/>
+                </a:solidFill>
+              </a:rPr>
+              <a:t>•  GenericAll / WriteDACL: control total o sobre la ACL de un objeto. Característica: permiten tomar control de cuentas/grupos.</a:t>
+            </a:r>
+          </a:p>
+          <a:p>
+            <a:pPr>
+              <a:spcAft>
+                <a:spcPts val="600"/>
+              </a:spcAft>
+            </a:pPr>
+            <a:r>
+              <a:rPr sz="1500">
+                <a:solidFill>
+                  <a:srgbClr val="22282E"/>
+                </a:solidFill>
+              </a:rPr>
+              <a:t>•  Cypher: lenguaje de consulta de grafos (Neo4j). Característica: permite preguntas personalizadas.</a:t>
+            </a:r>
+          </a:p>
+          <a:p>
+            <a:pPr>
+              <a:spcAft>
+                <a:spcPts val="600"/>
+              </a:spcAft>
+            </a:pPr>
+            <a:r>
+              <a:rPr sz="1500">
+                <a:solidFill>
+                  <a:srgbClr val="22282E"/>
+                </a:solidFill>
+              </a:rPr>
+              <a:t>•  Attack path: secuencia de aristas de un nodo controlado a uno objetivo. Característica: el "mapa" del ataque.</a:t>
             </a:r>
           </a:p>
         </p:txBody>
@@ -4375,7 +4796,7 @@
                   <a:srgbClr val="0B3D2E"/>
                 </a:solidFill>
               </a:rPr>
-              <a:t>🧪 Laboratorio guiado</a:t>
+              <a:t>📔 Glosario</a:t>
             </a:r>
           </a:p>
         </p:txBody>
@@ -4413,97 +4834,97 @@
                   <a:srgbClr val="22282E"/>
                 </a:solidFill>
               </a:rPr>
-              <a:t>•  Levanta BloodHound CE: curl -L https://ghst.ly/getbhce | docker compose -f - up (o el método del repo) y accede a la consola web.</a:t>
-            </a:r>
-          </a:p>
-          <a:p>
-            <a:pPr>
-              <a:spcAft>
-                <a:spcPts val="600"/>
-              </a:spcAft>
-            </a:pPr>
-            <a:r>
-              <a:rPr sz="1500">
-                <a:solidFill>
-                  <a:srgbClr val="22282E"/>
-                </a:solidFill>
-              </a:rPr>
-              <a:t>•  Recolecta con bloodhound-python:</a:t>
-            </a:r>
-          </a:p>
-          <a:p>
-            <a:pPr>
-              <a:spcAft>
-                <a:spcPts val="600"/>
-              </a:spcAft>
-            </a:pPr>
-            <a:r>
-              <a:rPr sz="1500">
-                <a:solidFill>
-                  <a:srgbClr val="22282E"/>
-                </a:solidFill>
-              </a:rPr>
-              <a:t>•  bloodhound-python -u lowuser -p 'Passw0rd' -d lab.local -ns 10.10.10.10 -c All</a:t>
-            </a:r>
-          </a:p>
-          <a:p>
-            <a:pPr>
-              <a:spcAft>
-                <a:spcPts val="600"/>
-              </a:spcAft>
-            </a:pPr>
-            <a:r>
-              <a:rPr sz="1500">
-                <a:solidFill>
-                  <a:srgbClr val="22282E"/>
-                </a:solidFill>
-              </a:rPr>
-              <a:t>•  o SharpHound.exe -c All desde una máquina del dominio.</a:t>
-            </a:r>
-          </a:p>
-          <a:p>
-            <a:pPr>
-              <a:spcAft>
-                <a:spcPts val="600"/>
-              </a:spcAft>
-            </a:pPr>
-            <a:r>
-              <a:rPr sz="1500">
-                <a:solidFill>
-                  <a:srgbClr val="22282E"/>
-                </a:solidFill>
-              </a:rPr>
-              <a:t>•  Importa los archivos zip/JSON en BloodHound y confirma que aparecen usuarios, equipos y grupos.</a:t>
-            </a:r>
-          </a:p>
-          <a:p>
-            <a:pPr>
-              <a:spcAft>
-                <a:spcPts val="600"/>
-              </a:spcAft>
-            </a:pPr>
-            <a:r>
-              <a:rPr sz="1500">
-                <a:solidFill>
-                  <a:srgbClr val="22282E"/>
-                </a:solidFill>
-              </a:rPr>
-              <a:t>•  Marca tu punto de partida. Señala tu usuario de bajo privilegio como "Owned".</a:t>
-            </a:r>
-          </a:p>
-          <a:p>
-            <a:pPr>
-              <a:spcAft>
-                <a:spcPts val="600"/>
-              </a:spcAft>
-            </a:pPr>
-            <a:r>
-              <a:rPr sz="1500">
-                <a:solidFill>
-                  <a:srgbClr val="22282E"/>
-                </a:solidFill>
-              </a:rPr>
-              <a:t>•  Ejecuta la consulta clave: "Shortest Path to Domain Admins from Owned Principals" y analiza las aristas del camino.</a:t>
+              <a:t>•  Grafo dirigido: nodos conectados por relaciones con dirección.</a:t>
+            </a:r>
+          </a:p>
+          <a:p>
+            <a:pPr>
+              <a:spcAft>
+                <a:spcPts val="600"/>
+              </a:spcAft>
+            </a:pPr>
+            <a:r>
+              <a:rPr sz="1500">
+                <a:solidFill>
+                  <a:srgbClr val="22282E"/>
+                </a:solidFill>
+              </a:rPr>
+              <a:t>•  Nodo: entidad modelada, como usuario, grupo, equipo o dominio.</a:t>
+            </a:r>
+          </a:p>
+          <a:p>
+            <a:pPr>
+              <a:spcAft>
+                <a:spcPts val="600"/>
+              </a:spcAft>
+            </a:pPr>
+            <a:r>
+              <a:rPr sz="1500">
+                <a:solidFill>
+                  <a:srgbClr val="22282E"/>
+                </a:solidFill>
+              </a:rPr>
+              <a:t>•  Arista: relación tipada entre dos nodos.</a:t>
+            </a:r>
+          </a:p>
+          <a:p>
+            <a:pPr>
+              <a:spcAft>
+                <a:spcPts val="600"/>
+              </a:spcAft>
+            </a:pPr>
+            <a:r>
+              <a:rPr sz="1500">
+                <a:solidFill>
+                  <a:srgbClr val="22282E"/>
+                </a:solidFill>
+              </a:rPr>
+              <a:t>•  Semántica de arista: condiciones exactas bajo las que una relación representa capacidad o estado.</a:t>
+            </a:r>
+          </a:p>
+          <a:p>
+            <a:pPr>
+              <a:spcAft>
+                <a:spcPts val="600"/>
+              </a:spcAft>
+            </a:pPr>
+            <a:r>
+              <a:rPr sz="1500">
+                <a:solidFill>
+                  <a:srgbClr val="22282E"/>
+                </a:solidFill>
+              </a:rPr>
+              <a:t>•  Attack path: secuencia potencial desde un punto inicial hasta un objetivo.</a:t>
+            </a:r>
+          </a:p>
+          <a:p>
+            <a:pPr>
+              <a:spcAft>
+                <a:spcPts val="600"/>
+              </a:spcAft>
+            </a:pPr>
+            <a:r>
+              <a:rPr sz="1500">
+                <a:solidFill>
+                  <a:srgbClr val="22282E"/>
+                </a:solidFill>
+              </a:rPr>
+              <a:t>•  Punto de entrada: identidad o activo considerado inicialmente controlado.</a:t>
+            </a:r>
+          </a:p>
+          <a:p>
+            <a:pPr>
+              <a:spcAft>
+                <a:spcPts val="600"/>
+              </a:spcAft>
+            </a:pPr>
+            <a:r>
+              <a:rPr sz="1500">
+                <a:solidFill>
+                  <a:srgbClr val="22282E"/>
+                </a:solidFill>
+              </a:rPr>
+              <a:t>•  Activo de alto valor: entidad cuya afectación tendría impacto significativo.</a:t>
             </a:r>
           </a:p>
         </p:txBody>
@@ -4554,7 +4975,7 @@
                   <a:srgbClr val="0B3D2E"/>
                 </a:solidFill>
               </a:rPr>
-              <a:t>✍️ Ejercicios</a:t>
+              <a:t>🧰 Herramientas y preparación</a:t>
             </a:r>
           </a:p>
         </p:txBody>
@@ -4592,82 +5013,52 @@
                   <a:srgbClr val="22282E"/>
                 </a:solidFill>
               </a:rPr>
-              <a:t>•  Recolecta el lab con dos collectors distintos y compara los resultados.</a:t>
-            </a:r>
-          </a:p>
-          <a:p>
-            <a:pPr>
-              <a:spcAft>
-                <a:spcPts val="600"/>
-              </a:spcAft>
-            </a:pPr>
-            <a:r>
-              <a:rPr sz="1500">
-                <a:solidFill>
-                  <a:srgbClr val="22282E"/>
-                </a:solidFill>
-              </a:rPr>
-              <a:t>•  Encuentra el camino más corto de tu usuario a Domain Admins.</a:t>
-            </a:r>
-          </a:p>
-          <a:p>
-            <a:pPr>
-              <a:spcAft>
-                <a:spcPts val="600"/>
-              </a:spcAft>
-            </a:pPr>
-            <a:r>
-              <a:rPr sz="1500">
-                <a:solidFill>
-                  <a:srgbClr val="22282E"/>
-                </a:solidFill>
-              </a:rPr>
-              <a:t>•  Explica cómo se abusa de WriteDACL sobre un grupo.</a:t>
-            </a:r>
-          </a:p>
-          <a:p>
-            <a:pPr>
-              <a:spcAft>
-                <a:spcPts val="600"/>
-              </a:spcAft>
-            </a:pPr>
-            <a:r>
-              <a:rPr sz="1500">
-                <a:solidFill>
-                  <a:srgbClr val="22282E"/>
-                </a:solidFill>
-              </a:rPr>
-              <a:t>•  Escribe una consulta Cypher que liste equipos con Unconstrained Delegation.</a:t>
-            </a:r>
-          </a:p>
-          <a:p>
-            <a:pPr>
-              <a:spcAft>
-                <a:spcPts val="600"/>
-              </a:spcAft>
-            </a:pPr>
-            <a:r>
-              <a:rPr sz="1500">
-                <a:solidFill>
-                  <a:srgbClr val="22282E"/>
-                </a:solidFill>
-              </a:rPr>
-              <a:t>•  Prioriza dos rutas por sigilo y justifica tu elección.</a:t>
-            </a:r>
-          </a:p>
-          <a:p>
-            <a:pPr>
-              <a:spcAft>
-                <a:spcPts val="600"/>
-              </a:spcAft>
-            </a:pPr>
-            <a:r>
-              <a:rPr sz="1500">
-                <a:solidFill>
-                  <a:srgbClr val="22282E"/>
-                </a:solidFill>
-              </a:rPr>
-              <a:t>•  Usa BloodHound de forma defensiva: identifica una relación peligrosa que recomendarías eliminar.</a:t>
+              <a:t>•  BloodHound CE (Docker) o BloodHound legacy + Neo4j.</a:t>
+            </a:r>
+          </a:p>
+          <a:p>
+            <a:pPr>
+              <a:spcAft>
+                <a:spcPts val="600"/>
+              </a:spcAft>
+            </a:pPr>
+            <a:r>
+              <a:rPr sz="1500">
+                <a:solidFill>
+                  <a:srgbClr val="22282E"/>
+                </a:solidFill>
+              </a:rPr>
+              <a:t>•  SharpHound (Windows) o bloodhound-python desde Linux.</a:t>
+            </a:r>
+          </a:p>
+          <a:p>
+            <a:pPr>
+              <a:spcAft>
+                <a:spcPts val="600"/>
+              </a:spcAft>
+            </a:pPr>
+            <a:r>
+              <a:rPr sz="1500">
+                <a:solidFill>
+                  <a:srgbClr val="22282E"/>
+                </a:solidFill>
+              </a:rPr>
+              <a:t>•  El AD lab / GOAD con datos de las clases anteriores (recolección de la Clase 170).</a:t>
+            </a:r>
+          </a:p>
+          <a:p>
+            <a:pPr>
+              <a:spcAft>
+                <a:spcPts val="600"/>
+              </a:spcAft>
+            </a:pPr>
+            <a:r>
+              <a:rPr sz="1500">
+                <a:solidFill>
+                  <a:srgbClr val="22282E"/>
+                </a:solidFill>
+              </a:rPr>
+              <a:t>•  Credenciales de bajo privilegio como punto de partida del análisis.</a:t>
             </a:r>
           </a:p>
         </p:txBody>
@@ -4718,7 +5109,7 @@
                   <a:srgbClr val="0B3D2E"/>
                 </a:solidFill>
               </a:rPr>
-              <a:t>📝 Reto verificable</a:t>
+              <a:t>🧪 Laboratorio guiado</a:t>
             </a:r>
           </a:p>
         </p:txBody>
@@ -4756,22 +5147,97 @@
                   <a:srgbClr val="22282E"/>
                 </a:solidFill>
               </a:rPr>
-              <a:t>•  Con BloodHound, identifica y documenta una ruta completa desde un usuario de bajo privilegio hasta Domain Admins en tu AD lab, explicando cómo se abusa de cada arista del camino.</a:t>
-            </a:r>
-          </a:p>
-          <a:p>
-            <a:pPr>
-              <a:spcAft>
-                <a:spcPts val="600"/>
-              </a:spcAft>
-            </a:pPr>
-            <a:r>
-              <a:rPr sz="1500">
-                <a:solidFill>
-                  <a:srgbClr val="22282E"/>
-                </a:solidFill>
-              </a:rPr>
-              <a:t>•  Criterio de aceptación: presentas el grafo con la ruta resaltada, listas cada arista en orden con la técnica concreta de abuso, y señalas cuál es el "salto" más ruidoso de la cadena.</a:t>
+              <a:t>•  Levanta BloodHound CE: curl -L https://ghst.ly/getbhce | docker compose -f - up (o el método del repo) y accede a la consola web.</a:t>
+            </a:r>
+          </a:p>
+          <a:p>
+            <a:pPr>
+              <a:spcAft>
+                <a:spcPts val="600"/>
+              </a:spcAft>
+            </a:pPr>
+            <a:r>
+              <a:rPr sz="1500">
+                <a:solidFill>
+                  <a:srgbClr val="22282E"/>
+                </a:solidFill>
+              </a:rPr>
+              <a:t>•  Recolecta con bloodhound-python:</a:t>
+            </a:r>
+          </a:p>
+          <a:p>
+            <a:pPr>
+              <a:spcAft>
+                <a:spcPts val="600"/>
+              </a:spcAft>
+            </a:pPr>
+            <a:r>
+              <a:rPr sz="1500">
+                <a:solidFill>
+                  <a:srgbClr val="22282E"/>
+                </a:solidFill>
+              </a:rPr>
+              <a:t>•  o SharpHound.exe -c All desde una máquina del dominio.</a:t>
+            </a:r>
+          </a:p>
+          <a:p>
+            <a:pPr>
+              <a:spcAft>
+                <a:spcPts val="600"/>
+              </a:spcAft>
+            </a:pPr>
+            <a:r>
+              <a:rPr sz="1500">
+                <a:solidFill>
+                  <a:srgbClr val="22282E"/>
+                </a:solidFill>
+              </a:rPr>
+              <a:t>•  Importa los archivos zip/JSON en BloodHound y confirma que aparecen usuarios, equipos y grupos.</a:t>
+            </a:r>
+          </a:p>
+          <a:p>
+            <a:pPr>
+              <a:spcAft>
+                <a:spcPts val="600"/>
+              </a:spcAft>
+            </a:pPr>
+            <a:r>
+              <a:rPr sz="1500">
+                <a:solidFill>
+                  <a:srgbClr val="22282E"/>
+                </a:solidFill>
+              </a:rPr>
+              <a:t>•  Marca tu punto de partida. Señala tu usuario de bajo privilegio como "Owned".</a:t>
+            </a:r>
+          </a:p>
+          <a:p>
+            <a:pPr>
+              <a:spcAft>
+                <a:spcPts val="600"/>
+              </a:spcAft>
+            </a:pPr>
+            <a:r>
+              <a:rPr sz="1500">
+                <a:solidFill>
+                  <a:srgbClr val="22282E"/>
+                </a:solidFill>
+              </a:rPr>
+              <a:t>•  Ejecuta la consulta clave: "Shortest Path to Domain Admins from Owned Principals" y analiza las aristas del camino.</a:t>
+            </a:r>
+          </a:p>
+          <a:p>
+            <a:pPr>
+              <a:spcAft>
+                <a:spcPts val="600"/>
+              </a:spcAft>
+            </a:pPr>
+            <a:r>
+              <a:rPr sz="1500">
+                <a:solidFill>
+                  <a:srgbClr val="22282E"/>
+                </a:solidFill>
+              </a:rPr>
+              <a:t>•  Explora aristas. Haz clic en una arista GenericAll y lee la ayuda de abuso (cómo explotarla con net, PowerView, Impacket).</a:t>
             </a:r>
           </a:p>
         </p:txBody>
